--- a/assets/figures-editable/c1-c2/c2-e20.pptx
+++ b/assets/figures-editable/c1-c2/c2-e20.pptx
@@ -7,7 +7,7 @@
   <p:sldIdLst>
     <p:sldId id="256" r:id="rId7"/>
   </p:sldIdLst>
-  <p:sldSz cx="11948160" cy="7924799" type="screen4x3"/>
+  <p:sldSz cx="12191695" cy="6858000" type="screen4x3"/>
   <p:notesSz cx="6858000" cy="9144000"/>
   <p:defaultTextStyle>
     <a:defPPr>
@@ -3098,14 +3098,14 @@
       <p:grpSpPr/>
       <p:sp>
         <p:nvSpPr>
-          <p:cNvPr id="2" name="text1" descr="sci-ppt:C2-E20-001"/>
+          <p:cNvPr id="2" name="C2-E20 text 0" descr="sci-ppt:o000"/>
           <p:cNvSpPr txBox="1"/>
           <p:nvPr/>
         </p:nvSpPr>
         <p:spPr>
           <a:xfrm>
-            <a:off x="316992" y="268224"/>
-            <a:ext cx="11277600" cy="359054"/>
+            <a:off x="274320" y="118872"/>
+            <a:ext cx="11612880" cy="340105"/>
           </a:xfrm>
           <a:prstGeom prst="rect">
             <a:avLst/>
@@ -3114,7 +3114,7 @@
           <a:effectLst/>
         </p:spPr>
         <p:txBody>
-          <a:bodyPr wrap="none" lIns="27432" rIns="27432" tIns="18288" bIns="18288" anchor="ctr">
+          <a:bodyPr wrap="none" lIns="18288" rIns="18288" tIns="18288" bIns="18288" anchor="t">
             <a:spAutoFit/>
           </a:bodyPr>
           <a:lstStyle/>
@@ -3125,35 +3125,143 @@
               </a:spcAft>
             </a:pPr>
             <a:r>
-              <a:rPr sz="1823" b="0" i="0">
+              <a:rPr sz="1900" b="1" i="0">
                 <a:solidFill>
                   <a:srgbClr val="8EDBD4"/>
                 </a:solidFill>
                 <a:latin typeface="Arial"/>
               </a:rPr>
-              <a:t>C2-E20 | Physical-variable diagram</a:t>
-            </a:r>
-          </a:p>
-        </p:txBody>
-      </p:sp>
-      <p:sp>
-        <p:nvSpPr>
-          <p:cNvPr id="3" name="rect2" descr="sci-ppt:C2-E20-002"/>
+              <a:t>C2-E20 · Exact single-component interface mass jump</a:t>
+            </a:r>
+          </a:p>
+        </p:txBody>
+      </p:sp>
+      <p:sp>
+        <p:nvSpPr>
+          <p:cNvPr id="3" name="C2-E20 round_rect 1" descr="sci-ppt:o001"/>
           <p:cNvSpPr/>
           <p:nvPr/>
         </p:nvSpPr>
         <p:spPr>
           <a:xfrm>
-            <a:off x="975360" y="1463040"/>
-            <a:ext cx="4267200" cy="2682240"/>
-          </a:xfrm>
-          <a:prstGeom prst="rect">
+            <a:off x="365760" y="914400"/>
+            <a:ext cx="5669280" cy="4937760"/>
+          </a:xfrm>
+          <a:prstGeom prst="roundRect">
             <a:avLst/>
           </a:prstGeom>
           <a:solidFill>
             <a:srgbClr val="213E4B"/>
           </a:solidFill>
-          <a:ln w="19050">
+          <a:ln w="20320">
+            <a:solidFill>
+              <a:srgbClr val="8EDBD4"/>
+            </a:solidFill>
+          </a:ln>
+          <a:effectLst/>
+        </p:spPr>
+        <p:txBody>
+          <a:bodyPr rtlCol="0" anchor="ctr"/>
+          <a:lstStyle/>
+          <a:p>
+            <a:pPr algn="ctr"/>
+          </a:p>
+        </p:txBody>
+      </p:sp>
+      <p:sp>
+        <p:nvSpPr>
+          <p:cNvPr id="4" name="C2-E20 text 2" descr="sci-ppt:o002"/>
+          <p:cNvSpPr txBox="1"/>
+          <p:nvPr/>
+        </p:nvSpPr>
+        <p:spPr>
+          <a:xfrm>
+            <a:off x="475488" y="969264"/>
+            <a:ext cx="5449824" cy="254889"/>
+          </a:xfrm>
+          <a:prstGeom prst="rect">
+            <a:avLst/>
+          </a:prstGeom>
+          <a:noFill/>
+          <a:effectLst/>
+        </p:spPr>
+        <p:txBody>
+          <a:bodyPr wrap="none" lIns="18288" rIns="18288" tIns="18288" bIns="18288" anchor="t">
+            <a:spAutoFit/>
+          </a:bodyPr>
+          <a:lstStyle/>
+          <a:p>
+            <a:pPr algn="l">
+              <a:spcAft>
+                <a:spcPts val="0"/>
+              </a:spcAft>
+            </a:pPr>
+            <a:r>
+              <a:rPr sz="1350" b="1" i="0">
+                <a:solidFill>
+                  <a:srgbClr val="8EDBD4"/>
+                </a:solidFill>
+                <a:latin typeface="Arial"/>
+              </a:rPr>
+              <a:t>Interface speed is not liquid speed</a:t>
+            </a:r>
+          </a:p>
+        </p:txBody>
+      </p:sp>
+      <p:sp>
+        <p:nvSpPr>
+          <p:cNvPr id="5" name="C2-E20 rect 3" descr="sci-ppt:o003"/>
+          <p:cNvSpPr/>
+          <p:nvPr/>
+        </p:nvSpPr>
+        <p:spPr>
+          <a:xfrm>
+            <a:off x="640080" y="2011680"/>
+            <a:ext cx="2377439" cy="2834640"/>
+          </a:xfrm>
+          <a:prstGeom prst="rect">
+            <a:avLst/>
+          </a:prstGeom>
+          <a:solidFill>
+            <a:srgbClr val="0C1820">
+              <a:alpha val="90000"/>
+            </a:srgbClr>
+          </a:solidFill>
+          <a:ln w="12700">
+            <a:solidFill>
+              <a:srgbClr val="B4C7D2">
+                <a:alpha val="90000"/>
+              </a:srgbClr>
+            </a:solidFill>
+          </a:ln>
+          <a:effectLst/>
+        </p:spPr>
+        <p:txBody>
+          <a:bodyPr rtlCol="0" anchor="ctr"/>
+          <a:lstStyle/>
+          <a:p>
+            <a:pPr algn="ctr"/>
+          </a:p>
+        </p:txBody>
+      </p:sp>
+      <p:sp>
+        <p:nvSpPr>
+          <p:cNvPr id="6" name="C2-E20 rect 4" descr="sci-ppt:o004"/>
+          <p:cNvSpPr/>
+          <p:nvPr/>
+        </p:nvSpPr>
+        <p:spPr>
+          <a:xfrm>
+            <a:off x="3017520" y="2011680"/>
+            <a:ext cx="2468880" cy="2834640"/>
+          </a:xfrm>
+          <a:prstGeom prst="rect">
+            <a:avLst/>
+          </a:prstGeom>
+          <a:solidFill>
+            <a:srgbClr val="1E4A5A"/>
+          </a:solidFill>
+          <a:ln w="12700">
             <a:solidFill>
               <a:srgbClr val="B4C7D2"/>
             </a:solidFill>
@@ -3168,46 +3276,38 @@
           </a:p>
         </p:txBody>
       </p:sp>
-      <p:sp>
-        <p:nvSpPr>
-          <p:cNvPr id="4" name="rect3" descr="sci-ppt:C2-E20-003"/>
-          <p:cNvSpPr/>
+      <p:cxnSp>
+        <p:nvCxnSpPr>
+          <p:cNvPr id="7" name="C2-E20 line 5" descr="sci-ppt:o005"/>
+          <p:cNvCxnSpPr/>
           <p:nvPr/>
-        </p:nvSpPr>
-        <p:spPr>
-          <a:xfrm>
-            <a:off x="5242560" y="1463040"/>
-            <a:ext cx="5242560" cy="2682240"/>
-          </a:xfrm>
-          <a:prstGeom prst="rect">
+        </p:nvCxnSpPr>
+        <p:spPr>
+          <a:xfrm>
+            <a:off x="3017520" y="1920240"/>
+            <a:ext cx="0" cy="3017520"/>
+          </a:xfrm>
+          <a:prstGeom prst="line">
             <a:avLst/>
           </a:prstGeom>
-          <a:noFill/>
-          <a:ln w="19050">
+          <a:ln w="50800">
             <a:solidFill>
-              <a:srgbClr val="B4C7D2"/>
+              <a:srgbClr val="F2B880"/>
             </a:solidFill>
           </a:ln>
           <a:effectLst/>
         </p:spPr>
-        <p:txBody>
-          <a:bodyPr rtlCol="0" anchor="ctr"/>
-          <a:lstStyle/>
-          <a:p>
-            <a:pPr algn="ctr"/>
-          </a:p>
-        </p:txBody>
-      </p:sp>
-      <p:sp>
-        <p:nvSpPr>
-          <p:cNvPr id="5" name="text4" descr="sci-ppt:C2-E20-004"/>
+      </p:cxnSp>
+      <p:sp>
+        <p:nvSpPr>
+          <p:cNvPr id="8" name="C2-E20 text 6" descr="sci-ppt:o006"/>
           <p:cNvSpPr txBox="1"/>
           <p:nvPr/>
         </p:nvSpPr>
         <p:spPr>
           <a:xfrm>
-            <a:off x="2194560" y="1767840"/>
-            <a:ext cx="2438400" cy="434644"/>
+            <a:off x="914400" y="2103120"/>
+            <a:ext cx="1828800" cy="433070"/>
           </a:xfrm>
           <a:prstGeom prst="rect">
             <a:avLst/>
@@ -3216,7 +3316,7 @@
           <a:effectLst/>
         </p:spPr>
         <p:txBody>
-          <a:bodyPr wrap="none" lIns="27432" rIns="27432" tIns="18288" bIns="18288" anchor="ctr">
+          <a:bodyPr wrap="none" lIns="18288" rIns="18288" tIns="18288" bIns="18288" anchor="t">
             <a:spAutoFit/>
           </a:bodyPr>
           <a:lstStyle/>
@@ -3227,27 +3327,43 @@
               </a:spcAft>
             </a:pPr>
             <a:r>
-              <a:rPr sz="2208" b="0" i="0">
+              <a:rPr sz="1250" b="1" i="0">
                 <a:solidFill>
-                  <a:srgbClr val="E7F0F3"/>
+                  <a:srgbClr val="B4C7D2"/>
                 </a:solidFill>
                 <a:latin typeface="Arial"/>
               </a:rPr>
-              <a:t>Vapor</a:t>
-            </a:r>
-          </a:p>
-        </p:txBody>
-      </p:sp>
-      <p:sp>
-        <p:nvSpPr>
-          <p:cNvPr id="6" name="text5" descr="sci-ppt:C2-E20-005"/>
+              <a:t>vapor</a:t>
+            </a:r>
+          </a:p>
+          <a:p>
+            <a:pPr algn="l">
+              <a:spcAft>
+                <a:spcPts val="0"/>
+              </a:spcAft>
+            </a:pPr>
+            <a:r>
+              <a:rPr sz="1250" b="1" i="0">
+                <a:solidFill>
+                  <a:srgbClr val="B4C7D2"/>
+                </a:solidFill>
+                <a:latin typeface="Arial"/>
+              </a:rPr>
+              <a:t>(bubble)</a:t>
+            </a:r>
+          </a:p>
+        </p:txBody>
+      </p:sp>
+      <p:sp>
+        <p:nvSpPr>
+          <p:cNvPr id="9" name="C2-E20 text 7" descr="sci-ppt:o007"/>
           <p:cNvSpPr txBox="1"/>
           <p:nvPr/>
         </p:nvSpPr>
         <p:spPr>
           <a:xfrm>
-            <a:off x="7315200" y="1767840"/>
-            <a:ext cx="2438400" cy="434644"/>
+            <a:off x="4114800" y="2103120"/>
+            <a:ext cx="1645920" cy="239395"/>
           </a:xfrm>
           <a:prstGeom prst="rect">
             <a:avLst/>
@@ -3256,7 +3372,7 @@
           <a:effectLst/>
         </p:spPr>
         <p:txBody>
-          <a:bodyPr wrap="none" lIns="27432" rIns="27432" tIns="18288" bIns="18288" anchor="ctr">
+          <a:bodyPr wrap="none" lIns="18288" rIns="18288" tIns="18288" bIns="18288" anchor="t">
             <a:spAutoFit/>
           </a:bodyPr>
           <a:lstStyle/>
@@ -3267,34 +3383,34 @@
               </a:spcAft>
             </a:pPr>
             <a:r>
-              <a:rPr sz="2208" b="0" i="0">
+              <a:rPr sz="1250" b="1" i="0">
                 <a:solidFill>
-                  <a:srgbClr val="E7F0F3"/>
+                  <a:srgbClr val="8EDBD4"/>
                 </a:solidFill>
                 <a:latin typeface="Arial"/>
               </a:rPr>
-              <a:t>Liquid</a:t>
+              <a:t>liquid</a:t>
             </a:r>
           </a:p>
         </p:txBody>
       </p:sp>
       <p:cxnSp>
         <p:nvCxnSpPr>
-          <p:cNvPr id="7" name="arrow6" descr="sci-ppt:C2-E20-006"/>
+          <p:cNvPr id="10" name="C2-E20 arrow 8" descr="sci-ppt:o008"/>
           <p:cNvCxnSpPr/>
           <p:nvPr/>
         </p:nvCxnSpPr>
         <p:spPr>
-          <a:xfrm flipH="1">
-            <a:off x="3657600" y="2804160"/>
-            <a:ext cx="3779520" cy="0"/>
+          <a:xfrm>
+            <a:off x="3017520" y="2926080"/>
+            <a:ext cx="2194559" cy="0"/>
           </a:xfrm>
           <a:prstGeom prst="line">
             <a:avLst/>
           </a:prstGeom>
-          <a:ln w="25400">
+          <a:ln w="50800">
             <a:solidFill>
-              <a:srgbClr val="F6BC77"/>
+              <a:srgbClr val="F2B880"/>
             </a:solidFill>
             <a:headEnd type="none" w="med" len="med"/>
             <a:tailEnd type="triangle" w="med" len="med"/>
@@ -3304,14 +3420,14 @@
       </p:cxnSp>
       <p:sp>
         <p:nvSpPr>
-          <p:cNvPr id="8" name="text7" descr="sci-ppt:C2-E20-007"/>
+          <p:cNvPr id="11" name="C2-E20 text 9" descr="sci-ppt:o009"/>
           <p:cNvSpPr txBox="1"/>
           <p:nvPr/>
         </p:nvSpPr>
         <p:spPr>
           <a:xfrm>
-            <a:off x="5852160" y="3108960"/>
-            <a:ext cx="4145280" cy="377952"/>
+            <a:off x="3108960" y="2468880"/>
+            <a:ext cx="2286000" cy="231648"/>
           </a:xfrm>
           <a:prstGeom prst="rect">
             <a:avLst/>
@@ -3320,7 +3436,7 @@
           <a:effectLst/>
         </p:spPr>
         <p:txBody>
-          <a:bodyPr wrap="none" lIns="27432" rIns="27432" tIns="18288" bIns="18288" anchor="ctr">
+          <a:bodyPr wrap="none" lIns="18288" rIns="18288" tIns="18288" bIns="18288" anchor="t">
             <a:spAutoFit/>
           </a:bodyPr>
           <a:lstStyle/>
@@ -3331,32 +3447,32 @@
               </a:spcAft>
             </a:pPr>
             <a:r>
-              <a:rPr sz="1920" b="0" i="0">
+              <a:rPr sz="1200" b="1" i="0">
                 <a:solidFill>
-                  <a:srgbClr val="F6BC77"/>
+                  <a:srgbClr val="F2B880"/>
                 </a:solidFill>
                 <a:latin typeface="Arial"/>
               </a:rPr>
-              <a:t>n: liquid → vapor</a:t>
+              <a:t>v_Γ = Ṙ  (10 m/s)</a:t>
             </a:r>
           </a:p>
         </p:txBody>
       </p:sp>
       <p:cxnSp>
         <p:nvCxnSpPr>
-          <p:cNvPr id="9" name="arrow8" descr="sci-ppt:C2-E20-008"/>
+          <p:cNvPr id="12" name="C2-E20 arrow 10" descr="sci-ppt:o010"/>
           <p:cNvCxnSpPr/>
           <p:nvPr/>
         </p:nvCxnSpPr>
         <p:spPr>
           <a:xfrm>
-            <a:off x="5242560" y="3779520"/>
-            <a:ext cx="1402080" cy="0"/>
+            <a:off x="3566160" y="3657600"/>
+            <a:ext cx="1755648" cy="0"/>
           </a:xfrm>
           <a:prstGeom prst="line">
             <a:avLst/>
           </a:prstGeom>
-          <a:ln w="25400">
+          <a:ln w="50800">
             <a:solidFill>
               <a:srgbClr val="8EDBD4"/>
             </a:solidFill>
@@ -3368,14 +3484,14 @@
       </p:cxnSp>
       <p:sp>
         <p:nvSpPr>
-          <p:cNvPr id="10" name="text9" descr="sci-ppt:C2-E20-009"/>
+          <p:cNvPr id="13" name="C2-E20 text 11" descr="sci-ppt:o011"/>
           <p:cNvSpPr txBox="1"/>
           <p:nvPr/>
         </p:nvSpPr>
         <p:spPr>
           <a:xfrm>
-            <a:off x="5486400" y="4206240"/>
-            <a:ext cx="4267200" cy="340156"/>
+            <a:off x="3108960" y="3749039"/>
+            <a:ext cx="2286000" cy="231648"/>
           </a:xfrm>
           <a:prstGeom prst="rect">
             <a:avLst/>
@@ -3384,7 +3500,7 @@
           <a:effectLst/>
         </p:spPr>
         <p:txBody>
-          <a:bodyPr wrap="none" lIns="27432" rIns="27432" tIns="18288" bIns="18288" anchor="ctr">
+          <a:bodyPr wrap="none" lIns="18288" rIns="18288" tIns="18288" bIns="18288" anchor="t">
             <a:spAutoFit/>
           </a:bodyPr>
           <a:lstStyle/>
@@ -3395,27 +3511,274 @@
               </a:spcAft>
             </a:pPr>
             <a:r>
-              <a:rPr sz="1728" b="0" i="0">
+              <a:rPr sz="1200" b="1" i="0">
+                <a:solidFill>
+                  <a:srgbClr val="8EDBD4"/>
+                </a:solidFill>
+                <a:latin typeface="Arial"/>
+              </a:rPr>
+              <a:t>uₗ(R) = 8 m/s</a:t>
+            </a:r>
+          </a:p>
+        </p:txBody>
+      </p:sp>
+      <p:cxnSp>
+        <p:nvCxnSpPr>
+          <p:cNvPr id="14" name="C2-E20 line 12" descr="sci-ppt:o012"/>
+          <p:cNvCxnSpPr/>
+          <p:nvPr/>
+        </p:nvCxnSpPr>
+        <p:spPr>
+          <a:xfrm flipH="1">
+            <a:off x="5212079" y="3657600"/>
+            <a:ext cx="109729" cy="0"/>
+          </a:xfrm>
+          <a:prstGeom prst="line">
+            <a:avLst/>
+          </a:prstGeom>
+          <a:ln w="12700">
+            <a:solidFill>
+              <a:srgbClr val="F28BA0"/>
+            </a:solidFill>
+          </a:ln>
+          <a:effectLst/>
+        </p:spPr>
+      </p:cxnSp>
+      <p:cxnSp>
+        <p:nvCxnSpPr>
+          <p:cNvPr id="15" name="C2-E20 line 13" descr="sci-ppt:o013"/>
+          <p:cNvCxnSpPr/>
+          <p:nvPr/>
+        </p:nvCxnSpPr>
+        <p:spPr>
+          <a:xfrm>
+            <a:off x="4773167" y="4297680"/>
+            <a:ext cx="438912" cy="0"/>
+          </a:xfrm>
+          <a:prstGeom prst="line">
+            <a:avLst/>
+          </a:prstGeom>
+          <a:ln w="16510">
+            <a:solidFill>
+              <a:srgbClr val="F28BA0"/>
+            </a:solidFill>
+          </a:ln>
+          <a:effectLst/>
+        </p:spPr>
+      </p:cxnSp>
+      <p:cxnSp>
+        <p:nvCxnSpPr>
+          <p:cNvPr id="16" name="C2-E20 line 14" descr="sci-ppt:o014"/>
+          <p:cNvCxnSpPr/>
+          <p:nvPr/>
+        </p:nvCxnSpPr>
+        <p:spPr>
+          <a:xfrm>
+            <a:off x="4773167" y="4233672"/>
+            <a:ext cx="0" cy="128016"/>
+          </a:xfrm>
+          <a:prstGeom prst="line">
+            <a:avLst/>
+          </a:prstGeom>
+          <a:ln w="16510">
+            <a:solidFill>
+              <a:srgbClr val="F28BA0"/>
+            </a:solidFill>
+          </a:ln>
+          <a:effectLst/>
+        </p:spPr>
+      </p:cxnSp>
+      <p:cxnSp>
+        <p:nvCxnSpPr>
+          <p:cNvPr id="17" name="C2-E20 line 15" descr="sci-ppt:o015"/>
+          <p:cNvCxnSpPr/>
+          <p:nvPr/>
+        </p:nvCxnSpPr>
+        <p:spPr>
+          <a:xfrm>
+            <a:off x="5212079" y="4233672"/>
+            <a:ext cx="0" cy="128016"/>
+          </a:xfrm>
+          <a:prstGeom prst="line">
+            <a:avLst/>
+          </a:prstGeom>
+          <a:ln w="16510">
+            <a:solidFill>
+              <a:srgbClr val="F28BA0"/>
+            </a:solidFill>
+          </a:ln>
+          <a:effectLst/>
+        </p:spPr>
+      </p:cxnSp>
+      <p:sp>
+        <p:nvSpPr>
+          <p:cNvPr id="18" name="C2-E20 text 16" descr="sci-ppt:o016"/>
+          <p:cNvSpPr txBox="1"/>
+          <p:nvPr/>
+        </p:nvSpPr>
+        <p:spPr>
+          <a:xfrm>
+            <a:off x="4078223" y="4396740"/>
+            <a:ext cx="1828800" cy="216153"/>
+          </a:xfrm>
+          <a:prstGeom prst="rect">
+            <a:avLst/>
+          </a:prstGeom>
+          <a:noFill/>
+          <a:effectLst/>
+        </p:spPr>
+        <p:txBody>
+          <a:bodyPr wrap="none" lIns="18288" rIns="18288" tIns="18288" bIns="18288" anchor="t">
+            <a:spAutoFit/>
+          </a:bodyPr>
+          <a:lstStyle/>
+          <a:p>
+            <a:pPr algn="ctr">
+              <a:spcAft>
+                <a:spcPts val="0"/>
+              </a:spcAft>
+            </a:pPr>
+          </a:p>
+        </p:txBody>
+      </p:sp>
+      <p:sp>
+        <p:nvSpPr>
+          <p:cNvPr id="19" name="C2-E20 text 17" descr="sci-ppt:o017"/>
+          <p:cNvSpPr txBox="1"/>
+          <p:nvPr/>
+        </p:nvSpPr>
+        <p:spPr>
+          <a:xfrm>
+            <a:off x="2743200" y="4434840"/>
+            <a:ext cx="2743200" cy="231648"/>
+          </a:xfrm>
+          <a:prstGeom prst="rect">
+            <a:avLst/>
+          </a:prstGeom>
+          <a:noFill/>
+          <a:effectLst/>
+        </p:spPr>
+        <p:txBody>
+          <a:bodyPr wrap="none" lIns="18288" rIns="18288" tIns="18288" bIns="18288" anchor="t">
+            <a:spAutoFit/>
+          </a:bodyPr>
+          <a:lstStyle/>
+          <a:p>
+            <a:pPr algn="l">
+              <a:spcAft>
+                <a:spcPts val="0"/>
+              </a:spcAft>
+            </a:pPr>
+            <a:r>
+              <a:rPr sz="1200" b="1" i="0">
+                <a:solidFill>
+                  <a:srgbClr val="F28BA0"/>
+                </a:solidFill>
+                <a:latin typeface="Arial"/>
+              </a:rPr>
+              <a:t>Ṙ − uₗ = 2 m/s</a:t>
+            </a:r>
+          </a:p>
+        </p:txBody>
+      </p:sp>
+      <p:sp>
+        <p:nvSpPr>
+          <p:cNvPr id="20" name="C2-E20 text 18" descr="sci-ppt:o018"/>
+          <p:cNvSpPr txBox="1"/>
+          <p:nvPr/>
+        </p:nvSpPr>
+        <p:spPr>
+          <a:xfrm>
+            <a:off x="502920" y="5074920"/>
+            <a:ext cx="5394960" cy="417576"/>
+          </a:xfrm>
+          <a:prstGeom prst="rect">
+            <a:avLst/>
+          </a:prstGeom>
+          <a:noFill/>
+          <a:effectLst/>
+        </p:spPr>
+        <p:txBody>
+          <a:bodyPr wrap="none" lIns="18288" rIns="18288" tIns="18288" bIns="18288" anchor="t">
+            <a:spAutoFit/>
+          </a:bodyPr>
+          <a:lstStyle/>
+          <a:p>
+            <a:pPr algn="l">
+              <a:spcAft>
+                <a:spcPts val="0"/>
+              </a:spcAft>
+            </a:pPr>
+            <a:r>
+              <a:rPr sz="1200" b="0" i="0">
                 <a:solidFill>
                   <a:srgbClr val="E7F0F3"/>
                 </a:solidFill>
                 <a:latin typeface="Arial"/>
               </a:rPr>
-              <a:t>+e_r, wall motion</a:t>
-            </a:r>
-          </a:p>
-        </p:txBody>
-      </p:sp>
-      <p:sp>
-        <p:nvSpPr>
-          <p:cNvPr id="11" name="text10" descr="sci-ppt:C2-E20-010"/>
+              <a:t>The interface outruns the adjacent liquid: liquid is converted to</a:t>
+            </a:r>
+          </a:p>
+          <a:p>
+            <a:pPr algn="l">
+              <a:spcAft>
+                <a:spcPts val="0"/>
+              </a:spcAft>
+            </a:pPr>
+            <a:r>
+              <a:rPr sz="1200" b="0" i="0">
+                <a:solidFill>
+                  <a:srgbClr val="E7F0F3"/>
+                </a:solidFill>
+                <a:latin typeface="Arial"/>
+              </a:rPr>
+              <a:t>vapor at the surface.</a:t>
+            </a:r>
+          </a:p>
+        </p:txBody>
+      </p:sp>
+      <p:sp>
+        <p:nvSpPr>
+          <p:cNvPr id="21" name="C2-E20 round_rect 19" descr="sci-ppt:o019"/>
+          <p:cNvSpPr/>
+          <p:nvPr/>
+        </p:nvSpPr>
+        <p:spPr>
+          <a:xfrm>
+            <a:off x="6309360" y="914400"/>
+            <a:ext cx="5532120" cy="4937760"/>
+          </a:xfrm>
+          <a:prstGeom prst="roundRect">
+            <a:avLst/>
+          </a:prstGeom>
+          <a:solidFill>
+            <a:srgbClr val="213E4B"/>
+          </a:solidFill>
+          <a:ln w="20320">
+            <a:solidFill>
+              <a:srgbClr val="8EDBD4"/>
+            </a:solidFill>
+          </a:ln>
+          <a:effectLst/>
+        </p:spPr>
+        <p:txBody>
+          <a:bodyPr rtlCol="0" anchor="ctr"/>
+          <a:lstStyle/>
+          <a:p>
+            <a:pPr algn="ctr"/>
+          </a:p>
+        </p:txBody>
+      </p:sp>
+      <p:sp>
+        <p:nvSpPr>
+          <p:cNvPr id="22" name="C2-E20 text 20" descr="sci-ppt:o020"/>
           <p:cNvSpPr txBox="1"/>
           <p:nvPr/>
         </p:nvSpPr>
         <p:spPr>
           <a:xfrm>
-            <a:off x="1219200" y="1036320"/>
-            <a:ext cx="3657600" cy="359054"/>
+            <a:off x="6419088" y="969264"/>
+            <a:ext cx="5312664" cy="254889"/>
           </a:xfrm>
           <a:prstGeom prst="rect">
             <a:avLst/>
@@ -3424,7 +3787,7 @@
           <a:effectLst/>
         </p:spPr>
         <p:txBody>
-          <a:bodyPr wrap="none" lIns="27432" rIns="27432" tIns="18288" bIns="18288" anchor="ctr">
+          <a:bodyPr wrap="none" lIns="18288" rIns="18288" tIns="18288" bIns="18288" anchor="t">
             <a:spAutoFit/>
           </a:bodyPr>
           <a:lstStyle/>
@@ -3435,27 +3798,67 @@
               </a:spcAft>
             </a:pPr>
             <a:r>
-              <a:rPr sz="1823" b="0" i="0">
+              <a:rPr sz="1350" b="1" i="0">
+                <a:solidFill>
+                  <a:srgbClr val="8EDBD4"/>
+                </a:solidFill>
+                <a:latin typeface="Arial"/>
+              </a:rPr>
+              <a:t>Single-component jump condition</a:t>
+            </a:r>
+          </a:p>
+        </p:txBody>
+      </p:sp>
+      <p:sp>
+        <p:nvSpPr>
+          <p:cNvPr id="23" name="C2-E20 text 21" descr="sci-ppt:o021"/>
+          <p:cNvSpPr txBox="1"/>
+          <p:nvPr/>
+        </p:nvSpPr>
+        <p:spPr>
+          <a:xfrm>
+            <a:off x="6446520" y="1371600"/>
+            <a:ext cx="5303520" cy="254889"/>
+          </a:xfrm>
+          <a:prstGeom prst="rect">
+            <a:avLst/>
+          </a:prstGeom>
+          <a:noFill/>
+          <a:effectLst/>
+        </p:spPr>
+        <p:txBody>
+          <a:bodyPr wrap="none" lIns="18288" rIns="18288" tIns="18288" bIns="18288" anchor="t">
+            <a:spAutoFit/>
+          </a:bodyPr>
+          <a:lstStyle/>
+          <a:p>
+            <a:pPr algn="l">
+              <a:spcAft>
+                <a:spcPts val="0"/>
+              </a:spcAft>
+            </a:pPr>
+            <a:r>
+              <a:rPr sz="1350" b="1" i="0">
                 <a:solidFill>
                   <a:srgbClr val="E7F0F3"/>
                 </a:solidFill>
                 <a:latin typeface="Arial"/>
               </a:rPr>
-              <a:t>Interface Gamma</a:t>
-            </a:r>
-          </a:p>
-        </p:txBody>
-      </p:sp>
-      <p:sp>
-        <p:nvSpPr>
-          <p:cNvPr id="12" name="text11" descr="sci-ppt:C2-E20-011"/>
+              <a:t>jₛ = ρₗ (uₗ − v_Γ)·n = ρᵥ (uᵥ − v_Γ)·n</a:t>
+            </a:r>
+          </a:p>
+        </p:txBody>
+      </p:sp>
+      <p:sp>
+        <p:nvSpPr>
+          <p:cNvPr id="24" name="C2-E20 text 22" descr="sci-ppt:o022"/>
           <p:cNvSpPr txBox="1"/>
           <p:nvPr/>
         </p:nvSpPr>
         <p:spPr>
           <a:xfrm>
-            <a:off x="365760" y="4974336"/>
-            <a:ext cx="5547360" cy="321259"/>
+            <a:off x="6446520" y="2011680"/>
+            <a:ext cx="5303520" cy="239395"/>
           </a:xfrm>
           <a:prstGeom prst="rect">
             <a:avLst/>
@@ -3464,7 +3867,7 @@
           <a:effectLst/>
         </p:spPr>
         <p:txBody>
-          <a:bodyPr wrap="none" lIns="27432" rIns="27432" tIns="18288" bIns="18288" anchor="ctr">
+          <a:bodyPr wrap="none" lIns="18288" rIns="18288" tIns="18288" bIns="18288" anchor="t">
             <a:spAutoFit/>
           </a:bodyPr>
           <a:lstStyle/>
@@ -3475,27 +3878,163 @@
               </a:spcAft>
             </a:pPr>
             <a:r>
-              <a:rPr sz="1632" b="0" i="0">
+              <a:rPr sz="1250" b="0" i="0">
+                <a:solidFill>
+                  <a:srgbClr val="B4C7D2"/>
+                </a:solidFill>
+                <a:latin typeface="Arial"/>
+              </a:rPr>
+              <a:t>n = −eᵣ (liquid → vapor),  v_Γ = Ṙ eᵣ</a:t>
+            </a:r>
+          </a:p>
+        </p:txBody>
+      </p:sp>
+      <p:sp>
+        <p:nvSpPr>
+          <p:cNvPr id="25" name="C2-E20 text 23" descr="sci-ppt:o023"/>
+          <p:cNvSpPr txBox="1"/>
+          <p:nvPr/>
+        </p:nvSpPr>
+        <p:spPr>
+          <a:xfrm>
+            <a:off x="6446520" y="2606040"/>
+            <a:ext cx="5303520" cy="262636"/>
+          </a:xfrm>
+          <a:prstGeom prst="rect">
+            <a:avLst/>
+          </a:prstGeom>
+          <a:noFill/>
+          <a:effectLst/>
+        </p:spPr>
+        <p:txBody>
+          <a:bodyPr wrap="none" lIns="18288" rIns="18288" tIns="18288" bIns="18288" anchor="t">
+            <a:spAutoFit/>
+          </a:bodyPr>
+          <a:lstStyle/>
+          <a:p>
+            <a:pPr algn="l">
+              <a:spcAft>
+                <a:spcPts val="0"/>
+              </a:spcAft>
+            </a:pPr>
+            <a:r>
+              <a:rPr sz="1400" b="1" i="0">
+                <a:solidFill>
+                  <a:srgbClr val="F2B880"/>
+                </a:solidFill>
+                <a:latin typeface="Arial"/>
+              </a:rPr>
+              <a:t>jₛ = ρₗ [Ṙ − uₗ(R)]</a:t>
+            </a:r>
+          </a:p>
+        </p:txBody>
+      </p:sp>
+      <p:sp>
+        <p:nvSpPr>
+          <p:cNvPr id="26" name="C2-E20 text 24" descr="sci-ppt:o024"/>
+          <p:cNvSpPr txBox="1"/>
+          <p:nvPr/>
+        </p:nvSpPr>
+        <p:spPr>
+          <a:xfrm>
+            <a:off x="6446520" y="3200400"/>
+            <a:ext cx="5303520" cy="262636"/>
+          </a:xfrm>
+          <a:prstGeom prst="rect">
+            <a:avLst/>
+          </a:prstGeom>
+          <a:noFill/>
+          <a:effectLst/>
+        </p:spPr>
+        <p:txBody>
+          <a:bodyPr wrap="none" lIns="18288" rIns="18288" tIns="18288" bIns="18288" anchor="t">
+            <a:spAutoFit/>
+          </a:bodyPr>
+          <a:lstStyle/>
+          <a:p>
+            <a:pPr algn="l">
+              <a:spcAft>
+                <a:spcPts val="0"/>
+              </a:spcAft>
+            </a:pPr>
+            <a:r>
+              <a:rPr sz="1400" b="1" i="0">
+                <a:solidFill>
+                  <a:srgbClr val="8EDBD4"/>
+                </a:solidFill>
+                <a:latin typeface="Arial"/>
+              </a:rPr>
+              <a:t>uₗ(R) = Ṙ − jₛ / ρₗ</a:t>
+            </a:r>
+          </a:p>
+        </p:txBody>
+      </p:sp>
+      <p:sp>
+        <p:nvSpPr>
+          <p:cNvPr id="27" name="C2-E20 text 25" descr="sci-ppt:o025"/>
+          <p:cNvSpPr txBox="1"/>
+          <p:nvPr/>
+        </p:nvSpPr>
+        <p:spPr>
+          <a:xfrm>
+            <a:off x="6446520" y="3840480"/>
+            <a:ext cx="5303520" cy="433070"/>
+          </a:xfrm>
+          <a:prstGeom prst="rect">
+            <a:avLst/>
+          </a:prstGeom>
+          <a:noFill/>
+          <a:effectLst/>
+        </p:spPr>
+        <p:txBody>
+          <a:bodyPr wrap="none" lIns="18288" rIns="18288" tIns="18288" bIns="18288" anchor="t">
+            <a:spAutoFit/>
+          </a:bodyPr>
+          <a:lstStyle/>
+          <a:p>
+            <a:pPr algn="l">
+              <a:spcAft>
+                <a:spcPts val="0"/>
+              </a:spcAft>
+            </a:pPr>
+            <a:r>
+              <a:rPr sz="1250" b="0" i="0">
                 <a:solidFill>
                   <a:srgbClr val="E7F0F3"/>
                 </a:solidFill>
                 <a:latin typeface="Arial"/>
               </a:rPr>
-              <a:t>R, Ṙ: moving bubble surface</a:t>
-            </a:r>
-          </a:p>
-        </p:txBody>
-      </p:sp>
-      <p:sp>
-        <p:nvSpPr>
-          <p:cNvPr id="13" name="text12" descr="sci-ppt:C2-E20-012"/>
+              <a:t>With no phase change, jₛ = 0 and the liquid at the wall moves</a:t>
+            </a:r>
+          </a:p>
+          <a:p>
+            <a:pPr algn="l">
+              <a:spcAft>
+                <a:spcPts val="0"/>
+              </a:spcAft>
+            </a:pPr>
+            <a:r>
+              <a:rPr sz="1250" b="0" i="0">
+                <a:solidFill>
+                  <a:srgbClr val="E7F0F3"/>
+                </a:solidFill>
+                <a:latin typeface="Arial"/>
+              </a:rPr>
+              <a:t>with the wall (uₗ = Ṙ). Evaporation breaks that equality.</a:t>
+            </a:r>
+          </a:p>
+        </p:txBody>
+      </p:sp>
+      <p:sp>
+        <p:nvSpPr>
+          <p:cNvPr id="28" name="C2-E20 text 26" descr="sci-ppt:o026"/>
           <p:cNvSpPr txBox="1"/>
           <p:nvPr/>
         </p:nvSpPr>
         <p:spPr>
           <a:xfrm>
-            <a:off x="365760" y="5266944"/>
-            <a:ext cx="5547360" cy="321259"/>
+            <a:off x="6446520" y="4892040"/>
+            <a:ext cx="5303520" cy="223900"/>
           </a:xfrm>
           <a:prstGeom prst="rect">
             <a:avLst/>
@@ -3504,7 +4043,7 @@
           <a:effectLst/>
         </p:spPr>
         <p:txBody>
-          <a:bodyPr wrap="none" lIns="27432" rIns="27432" tIns="18288" bIns="18288" anchor="ctr">
+          <a:bodyPr wrap="none" lIns="18288" rIns="18288" tIns="18288" bIns="18288" anchor="t">
             <a:spAutoFit/>
           </a:bodyPr>
           <a:lstStyle/>
@@ -3515,27 +4054,27 @@
               </a:spcAft>
             </a:pPr>
             <a:r>
-              <a:rPr sz="1632" b="0" i="0">
+              <a:rPr sz="1150" b="0" i="0">
                 <a:solidFill>
-                  <a:srgbClr val="E7F0F3"/>
+                  <a:srgbClr val="B4C7D2"/>
                 </a:solidFill>
                 <a:latin typeface="Arial"/>
               </a:rPr>
-              <a:t>n = −e_r: liquid → vapor</a:t>
-            </a:r>
-          </a:p>
-        </p:txBody>
-      </p:sp>
-      <p:sp>
-        <p:nvSpPr>
-          <p:cNvPr id="14" name="text13" descr="sci-ppt:C2-E20-013"/>
+              <a:t>Speeds in the left panel are illustrative.</a:t>
+            </a:r>
+          </a:p>
+        </p:txBody>
+      </p:sp>
+      <p:sp>
+        <p:nvSpPr>
+          <p:cNvPr id="29" name="C2-E20 text 27" descr="sci-ppt:o027"/>
           <p:cNvSpPr txBox="1"/>
           <p:nvPr/>
         </p:nvSpPr>
         <p:spPr>
           <a:xfrm>
-            <a:off x="365760" y="5559552"/>
-            <a:ext cx="5547360" cy="321259"/>
+            <a:off x="320040" y="6510528"/>
+            <a:ext cx="11521440" cy="200660"/>
           </a:xfrm>
           <a:prstGeom prst="rect">
             <a:avLst/>
@@ -3544,7 +4083,7 @@
           <a:effectLst/>
         </p:spPr>
         <p:txBody>
-          <a:bodyPr wrap="none" lIns="27432" rIns="27432" tIns="18288" bIns="18288" anchor="ctr">
+          <a:bodyPr wrap="none" lIns="18288" rIns="18288" tIns="18288" bIns="18288" anchor="t">
             <a:spAutoFit/>
           </a:bodyPr>
           <a:lstStyle/>
@@ -3555,293 +4094,13 @@
               </a:spcAft>
             </a:pPr>
             <a:r>
-              <a:rPr sz="1632" b="0" i="0">
-                <a:solidFill>
-                  <a:srgbClr val="E7F0F3"/>
-                </a:solidFill>
-                <a:latin typeface="Arial"/>
-              </a:rPr>
-              <a:t>u_v: vapor-side motion</a:t>
-            </a:r>
-          </a:p>
-        </p:txBody>
-      </p:sp>
-      <p:sp>
-        <p:nvSpPr>
-          <p:cNvPr id="15" name="text14" descr="sci-ppt:C2-E20-014"/>
-          <p:cNvSpPr txBox="1"/>
-          <p:nvPr/>
-        </p:nvSpPr>
-        <p:spPr>
-          <a:xfrm>
-            <a:off x="365760" y="5852160"/>
-            <a:ext cx="5547360" cy="321259"/>
-          </a:xfrm>
-          <a:prstGeom prst="rect">
-            <a:avLst/>
-          </a:prstGeom>
-          <a:noFill/>
-          <a:effectLst/>
-        </p:spPr>
-        <p:txBody>
-          <a:bodyPr wrap="none" lIns="27432" rIns="27432" tIns="18288" bIns="18288" anchor="ctr">
-            <a:spAutoFit/>
-          </a:bodyPr>
-          <a:lstStyle/>
-          <a:p>
-            <a:pPr algn="l">
-              <a:spcAft>
-                <a:spcPts val="0"/>
-              </a:spcAft>
-            </a:pPr>
-            <a:r>
-              <a:rPr sz="1632" b="0" i="0">
-                <a:solidFill>
-                  <a:srgbClr val="E7F0F3"/>
-                </a:solidFill>
-                <a:latin typeface="Arial"/>
-              </a:rPr>
-              <a:t>ρ_l, ρ_v: adjoining densities</a:t>
-            </a:r>
-          </a:p>
-        </p:txBody>
-      </p:sp>
-      <p:sp>
-        <p:nvSpPr>
-          <p:cNvPr id="16" name="text15" descr="sci-ppt:C2-E20-015"/>
-          <p:cNvSpPr txBox="1"/>
-          <p:nvPr/>
-        </p:nvSpPr>
-        <p:spPr>
-          <a:xfrm>
-            <a:off x="6156960" y="4974336"/>
-            <a:ext cx="5547360" cy="321259"/>
-          </a:xfrm>
-          <a:prstGeom prst="rect">
-            <a:avLst/>
-          </a:prstGeom>
-          <a:noFill/>
-          <a:effectLst/>
-        </p:spPr>
-        <p:txBody>
-          <a:bodyPr wrap="none" lIns="27432" rIns="27432" tIns="18288" bIns="18288" anchor="ctr">
-            <a:spAutoFit/>
-          </a:bodyPr>
-          <a:lstStyle/>
-          <a:p>
-            <a:pPr algn="l">
-              <a:spcAft>
-                <a:spcPts val="0"/>
-              </a:spcAft>
-            </a:pPr>
-            <a:r>
-              <a:rPr sz="1632" b="0" i="0">
-                <a:solidFill>
-                  <a:srgbClr val="E7F0F3"/>
-                </a:solidFill>
-                <a:latin typeface="Arial"/>
-              </a:rPr>
-              <a:t>e_r: outward radial direction</a:t>
-            </a:r>
-          </a:p>
-        </p:txBody>
-      </p:sp>
-      <p:sp>
-        <p:nvSpPr>
-          <p:cNvPr id="17" name="text16" descr="sci-ppt:C2-E20-016"/>
-          <p:cNvSpPr txBox="1"/>
-          <p:nvPr/>
-        </p:nvSpPr>
-        <p:spPr>
-          <a:xfrm>
-            <a:off x="6156960" y="5266944"/>
-            <a:ext cx="5547360" cy="321259"/>
-          </a:xfrm>
-          <a:prstGeom prst="rect">
-            <a:avLst/>
-          </a:prstGeom>
-          <a:noFill/>
-          <a:effectLst/>
-        </p:spPr>
-        <p:txBody>
-          <a:bodyPr wrap="none" lIns="27432" rIns="27432" tIns="18288" bIns="18288" anchor="ctr">
-            <a:spAutoFit/>
-          </a:bodyPr>
-          <a:lstStyle/>
-          <a:p>
-            <a:pPr algn="l">
-              <a:spcAft>
-                <a:spcPts val="0"/>
-              </a:spcAft>
-            </a:pPr>
-            <a:r>
-              <a:rPr sz="1632" b="0" i="0">
-                <a:solidFill>
-                  <a:srgbClr val="E7F0F3"/>
-                </a:solidFill>
-                <a:latin typeface="Arial"/>
-              </a:rPr>
-              <a:t>u_l(R), u_l: outside-liquid motion</a:t>
-            </a:r>
-          </a:p>
-        </p:txBody>
-      </p:sp>
-      <p:sp>
-        <p:nvSpPr>
-          <p:cNvPr id="18" name="text17" descr="sci-ppt:C2-E20-017"/>
-          <p:cNvSpPr txBox="1"/>
-          <p:nvPr/>
-        </p:nvSpPr>
-        <p:spPr>
-          <a:xfrm>
-            <a:off x="6156960" y="5559552"/>
-            <a:ext cx="5547360" cy="321259"/>
-          </a:xfrm>
-          <a:prstGeom prst="rect">
-            <a:avLst/>
-          </a:prstGeom>
-          <a:noFill/>
-          <a:effectLst/>
-        </p:spPr>
-        <p:txBody>
-          <a:bodyPr wrap="none" lIns="27432" rIns="27432" tIns="18288" bIns="18288" anchor="ctr">
-            <a:spAutoFit/>
-          </a:bodyPr>
-          <a:lstStyle/>
-          <a:p>
-            <a:pPr algn="l">
-              <a:spcAft>
-                <a:spcPts val="0"/>
-              </a:spcAft>
-            </a:pPr>
-            <a:r>
-              <a:rPr sz="1632" b="0" i="0">
-                <a:solidFill>
-                  <a:srgbClr val="E7F0F3"/>
-                </a:solidFill>
-                <a:latin typeface="Arial"/>
-              </a:rPr>
-              <a:t>v_Γ: interface motion</a:t>
-            </a:r>
-          </a:p>
-        </p:txBody>
-      </p:sp>
-      <p:sp>
-        <p:nvSpPr>
-          <p:cNvPr id="19" name="text18" descr="sci-ppt:C2-E20-018"/>
-          <p:cNvSpPr txBox="1"/>
-          <p:nvPr/>
-        </p:nvSpPr>
-        <p:spPr>
-          <a:xfrm>
-            <a:off x="6156960" y="5852160"/>
-            <a:ext cx="5547360" cy="321259"/>
-          </a:xfrm>
-          <a:prstGeom prst="rect">
-            <a:avLst/>
-          </a:prstGeom>
-          <a:noFill/>
-          <a:effectLst/>
-        </p:spPr>
-        <p:txBody>
-          <a:bodyPr wrap="none" lIns="27432" rIns="27432" tIns="18288" bIns="18288" anchor="ctr">
-            <a:spAutoFit/>
-          </a:bodyPr>
-          <a:lstStyle/>
-          <a:p>
-            <a:pPr algn="l">
-              <a:spcAft>
-                <a:spcPts val="0"/>
-              </a:spcAft>
-            </a:pPr>
-            <a:r>
-              <a:rPr sz="1632" b="0" i="0">
-                <a:solidFill>
-                  <a:srgbClr val="E7F0F3"/>
-                </a:solidFill>
-                <a:latin typeface="Arial"/>
-              </a:rPr>
-              <a:t>j_s: evaporation through interface</a:t>
-            </a:r>
-          </a:p>
-        </p:txBody>
-      </p:sp>
-      <p:sp>
-        <p:nvSpPr>
-          <p:cNvPr id="20" name="text19" descr="sci-ppt:C2-E20-019"/>
-          <p:cNvSpPr txBox="1"/>
-          <p:nvPr/>
-        </p:nvSpPr>
-        <p:spPr>
-          <a:xfrm>
-            <a:off x="365760" y="6339840"/>
-            <a:ext cx="11277600" cy="302361"/>
-          </a:xfrm>
-          <a:prstGeom prst="rect">
-            <a:avLst/>
-          </a:prstGeom>
-          <a:noFill/>
-          <a:effectLst/>
-        </p:spPr>
-        <p:txBody>
-          <a:bodyPr wrap="none" lIns="27432" rIns="27432" tIns="18288" bIns="18288" anchor="ctr">
-            <a:spAutoFit/>
-          </a:bodyPr>
-          <a:lstStyle/>
-          <a:p>
-            <a:pPr algn="l">
-              <a:spcAft>
-                <a:spcPts val="0"/>
-              </a:spcAft>
-            </a:pPr>
-            <a:r>
-              <a:rPr sz="1536" b="0" i="0">
+              <a:rPr sz="1000" b="0" i="0">
                 <a:solidFill>
                   <a:srgbClr val="B4C7D2"/>
                 </a:solidFill>
                 <a:latin typeface="Arial"/>
               </a:rPr>
-              <a:t>Positive j_s makes liquid speed smaller than outward wall speed</a:t>
-            </a:r>
-          </a:p>
-        </p:txBody>
-      </p:sp>
-      <p:sp>
-        <p:nvSpPr>
-          <p:cNvPr id="21" name="text20" descr="sci-ppt:C2-E20-020"/>
-          <p:cNvSpPr txBox="1"/>
-          <p:nvPr/>
-        </p:nvSpPr>
-        <p:spPr>
-          <a:xfrm>
-            <a:off x="365760" y="6632448"/>
-            <a:ext cx="11277600" cy="302361"/>
-          </a:xfrm>
-          <a:prstGeom prst="rect">
-            <a:avLst/>
-          </a:prstGeom>
-          <a:noFill/>
-          <a:effectLst/>
-        </p:spPr>
-        <p:txBody>
-          <a:bodyPr wrap="none" lIns="27432" rIns="27432" tIns="18288" bIns="18288" anchor="ctr">
-            <a:spAutoFit/>
-          </a:bodyPr>
-          <a:lstStyle/>
-          <a:p>
-            <a:pPr algn="l">
-              <a:spcAft>
-                <a:spcPts val="0"/>
-              </a:spcAft>
-            </a:pPr>
-            <a:r>
-              <a:rPr sz="1536" b="0" i="0">
-                <a:solidFill>
-                  <a:srgbClr val="B4C7D2"/>
-                </a:solidFill>
-                <a:latin typeface="Arial"/>
-              </a:rPr>
-              <a:t>For mixtures, species diffusion augments the component fluxes</a:t>
+              <a:t>Mass jump of Eq. C2-E20.</a:t>
             </a:r>
           </a:p>
         </p:txBody>
